--- a/data-axis/data-axis.pptx
+++ b/data-axis/data-axis.pptx
@@ -16203,7 +16203,7 @@
         <p:spPr>
           <a:xfrm>
             <a:off x="548640" y="1371600"/>
-            <a:ext cx="11091672" cy="312039"/>
+            <a:ext cx="11091672" cy="265103"/>
           </a:xfrm>
           <a:prstGeom prst="rect">
             <a:avLst/>
@@ -16249,8 +16249,8 @@
         </p:nvSpPr>
         <p:spPr>
           <a:xfrm>
-            <a:off x="548640" y="1829943"/>
-            <a:ext cx="11091672" cy="312039"/>
+            <a:off x="548640" y="1761001"/>
+            <a:ext cx="11091672" cy="265103"/>
           </a:xfrm>
           <a:prstGeom prst="rect">
             <a:avLst/>
@@ -16296,8 +16296,8 @@
         </p:nvSpPr>
         <p:spPr>
           <a:xfrm>
-            <a:off x="548640" y="2288286"/>
-            <a:ext cx="11091672" cy="312039"/>
+            <a:off x="548640" y="2150402"/>
+            <a:ext cx="11091672" cy="265103"/>
           </a:xfrm>
           <a:prstGeom prst="rect">
             <a:avLst/>
@@ -16321,15 +16321,15 @@
               <a:buNone/>
             </a:pPr>
             <a:r>
-              <a:rPr lang="en-US" sz="1350" dirty="0">
-                <a:solidFill>
-                  <a:srgbClr val="6B6357"/>
-                </a:solidFill>
-                <a:latin typeface="Malgun Gothic" pitchFamily="34" charset="0"/>
-                <a:ea typeface="Malgun Gothic" pitchFamily="34" charset="-122"/>
-                <a:cs typeface="Malgun Gothic" pitchFamily="34" charset="-120"/>
-              </a:rPr>
-              <a:t>🟡 남을 수 있는 것 · 요청 메타데이터, 입력·출력 로그, 안전 분류 결과, 청구용 사용량 기록</a:t>
+              <a:rPr lang="en-US" sz="1350" b="1" dirty="0">
+                <a:solidFill>
+                  <a:srgbClr val="2A2723"/>
+                </a:solidFill>
+                <a:latin typeface="Malgun Gothic" pitchFamily="34" charset="0"/>
+                <a:ea typeface="Malgun Gothic" pitchFamily="34" charset="-122"/>
+                <a:cs typeface="Malgun Gothic" pitchFamily="34" charset="-120"/>
+              </a:rPr>
+              <a:t>내 화면</a:t>
             </a:r>
             <a:endParaRPr lang="en-US" sz="1350" dirty="0"/>
           </a:p>
@@ -16343,8 +16343,8 @@
         </p:nvSpPr>
         <p:spPr>
           <a:xfrm>
-            <a:off x="548640" y="2746629"/>
-            <a:ext cx="11091672" cy="312039"/>
+            <a:off x="548640" y="2539803"/>
+            <a:ext cx="11091672" cy="265103"/>
           </a:xfrm>
           <a:prstGeom prst="rect">
             <a:avLst/>
@@ -16368,6 +16368,26 @@
               <a:buNone/>
             </a:pPr>
             <a:r>
+              <a:rPr lang="en-US" sz="1350" b="1" dirty="0">
+                <a:solidFill>
+                  <a:srgbClr val="2A2723"/>
+                </a:solidFill>
+                <a:latin typeface="Malgun Gothic" pitchFamily="34" charset="0"/>
+                <a:ea typeface="Malgun Gothic" pitchFamily="34" charset="-122"/>
+                <a:cs typeface="Malgun Gothic" pitchFamily="34" charset="-120"/>
+              </a:rPr>
+              <a:t>회선과 리전</a:t>
+            </a:r>
+            <a:pPr indent="0" marL="0">
+              <a:lnSpc>
+                <a:spcPct val="108000"/>
+              </a:lnSpc>
+              <a:spcAft>
+                <a:spcPts val="200"/>
+              </a:spcAft>
+              <a:buNone/>
+            </a:pPr>
+            <a:r>
               <a:rPr lang="en-US" sz="1350" dirty="0">
                 <a:solidFill>
                   <a:srgbClr val="6B6357"/>
@@ -16376,7 +16396,7 @@
                 <a:ea typeface="Malgun Gothic" pitchFamily="34" charset="-122"/>
                 <a:cs typeface="Malgun Gothic" pitchFamily="34" charset="-120"/>
               </a:rPr>
-              <a:t>내 노트북에서 돌릴 때</a:t>
+              <a:t>어느 나라를 지나는가</a:t>
             </a:r>
             <a:endParaRPr lang="en-US" sz="1350" dirty="0"/>
           </a:p>
@@ -16390,8 +16410,8 @@
         </p:nvSpPr>
         <p:spPr>
           <a:xfrm>
-            <a:off x="548640" y="3204972"/>
-            <a:ext cx="11091672" cy="312039"/>
+            <a:off x="548640" y="2929204"/>
+            <a:ext cx="11091672" cy="265103"/>
           </a:xfrm>
           <a:prstGeom prst="rect">
             <a:avLst/>
@@ -16415,6 +16435,26 @@
               <a:buNone/>
             </a:pPr>
             <a:r>
+              <a:rPr lang="en-US" sz="1350" b="1" dirty="0">
+                <a:solidFill>
+                  <a:srgbClr val="2A2723"/>
+                </a:solidFill>
+                <a:latin typeface="Malgun Gothic" pitchFamily="34" charset="0"/>
+                <a:ea typeface="Malgun Gothic" pitchFamily="34" charset="-122"/>
+                <a:cs typeface="Malgun Gothic" pitchFamily="34" charset="-120"/>
+              </a:rPr>
+              <a:t>사업자 경계</a:t>
+            </a:r>
+            <a:pPr indent="0" marL="0">
+              <a:lnSpc>
+                <a:spcPct val="108000"/>
+              </a:lnSpc>
+              <a:spcAft>
+                <a:spcPts val="200"/>
+              </a:spcAft>
+              <a:buNone/>
+            </a:pPr>
+            <a:r>
               <a:rPr lang="en-US" sz="1350" dirty="0">
                 <a:solidFill>
                   <a:srgbClr val="6B6357"/>
@@ -16423,6 +16463,355 @@
                 <a:ea typeface="Malgun Gothic" pitchFamily="34" charset="-122"/>
                 <a:cs typeface="Malgun Gothic" pitchFamily="34" charset="-120"/>
               </a:rPr>
+              <a:t>여기서부터 남의 시스템</a:t>
+            </a:r>
+            <a:endParaRPr lang="en-US" sz="1350" dirty="0"/>
+          </a:p>
+        </p:txBody>
+      </p:sp>
+      <p:sp>
+        <p:nvSpPr>
+          <p:cNvPr id="9" name="Text 7"/>
+          <p:cNvSpPr/>
+          <p:nvPr/>
+        </p:nvSpPr>
+        <p:spPr>
+          <a:xfrm>
+            <a:off x="548640" y="3318605"/>
+            <a:ext cx="11091672" cy="265103"/>
+          </a:xfrm>
+          <a:prstGeom prst="rect">
+            <a:avLst/>
+          </a:prstGeom>
+          <a:noFill/>
+          <a:ln/>
+        </p:spPr>
+        <p:txBody>
+          <a:bodyPr wrap="square" rtlCol="0" anchor="t">
+            <a:normAutofit/>
+          </a:bodyPr>
+          <a:lstStyle/>
+          <a:p>
+            <a:pPr indent="0" marL="0">
+              <a:lnSpc>
+                <a:spcPct val="108000"/>
+              </a:lnSpc>
+              <a:spcAft>
+                <a:spcPts val="200"/>
+              </a:spcAft>
+              <a:buNone/>
+            </a:pPr>
+            <a:r>
+              <a:rPr lang="en-US" sz="1350" b="1" dirty="0">
+                <a:solidFill>
+                  <a:srgbClr val="2A2723"/>
+                </a:solidFill>
+                <a:latin typeface="Malgun Gothic" pitchFamily="34" charset="0"/>
+                <a:ea typeface="Malgun Gothic" pitchFamily="34" charset="-122"/>
+                <a:cs typeface="Malgun Gothic" pitchFamily="34" charset="-120"/>
+              </a:rPr>
+              <a:t>응답</a:t>
+            </a:r>
+            <a:endParaRPr lang="en-US" sz="1350" dirty="0"/>
+          </a:p>
+        </p:txBody>
+      </p:sp>
+      <p:sp>
+        <p:nvSpPr>
+          <p:cNvPr id="10" name="Text 8"/>
+          <p:cNvSpPr/>
+          <p:nvPr/>
+        </p:nvSpPr>
+        <p:spPr>
+          <a:xfrm>
+            <a:off x="548640" y="3708006"/>
+            <a:ext cx="11091672" cy="265103"/>
+          </a:xfrm>
+          <a:prstGeom prst="rect">
+            <a:avLst/>
+          </a:prstGeom>
+          <a:noFill/>
+          <a:ln/>
+        </p:spPr>
+        <p:txBody>
+          <a:bodyPr wrap="square" rtlCol="0" anchor="t">
+            <a:normAutofit/>
+          </a:bodyPr>
+          <a:lstStyle/>
+          <a:p>
+            <a:pPr indent="0" marL="0">
+              <a:lnSpc>
+                <a:spcPct val="108000"/>
+              </a:lnSpc>
+              <a:spcAft>
+                <a:spcPts val="200"/>
+              </a:spcAft>
+              <a:buNone/>
+            </a:pPr>
+            <a:r>
+              <a:rPr lang="en-US" sz="1350" dirty="0">
+                <a:solidFill>
+                  <a:srgbClr val="6B6357"/>
+                </a:solidFill>
+                <a:latin typeface="Malgun Gothic" pitchFamily="34" charset="0"/>
+                <a:ea typeface="Malgun Gothic" pitchFamily="34" charset="-122"/>
+                <a:cs typeface="Malgun Gothic" pitchFamily="34" charset="-120"/>
+              </a:rPr>
+              <a:t>🟡 남을 수 있는 것 · 요청 메타데이터, 입력·출력 로그, 안전 분류 결과, 청구용 사용량 기록</a:t>
+            </a:r>
+            <a:endParaRPr lang="en-US" sz="1350" dirty="0"/>
+          </a:p>
+        </p:txBody>
+      </p:sp>
+      <p:sp>
+        <p:nvSpPr>
+          <p:cNvPr id="11" name="Text 9"/>
+          <p:cNvSpPr/>
+          <p:nvPr/>
+        </p:nvSpPr>
+        <p:spPr>
+          <a:xfrm>
+            <a:off x="548640" y="4097407"/>
+            <a:ext cx="11091672" cy="265103"/>
+          </a:xfrm>
+          <a:prstGeom prst="rect">
+            <a:avLst/>
+          </a:prstGeom>
+          <a:noFill/>
+          <a:ln/>
+        </p:spPr>
+        <p:txBody>
+          <a:bodyPr wrap="square" rtlCol="0" anchor="t">
+            <a:normAutofit/>
+          </a:bodyPr>
+          <a:lstStyle/>
+          <a:p>
+            <a:pPr indent="0" marL="0">
+              <a:lnSpc>
+                <a:spcPct val="108000"/>
+              </a:lnSpc>
+              <a:spcAft>
+                <a:spcPts val="200"/>
+              </a:spcAft>
+              <a:buNone/>
+            </a:pPr>
+            <a:r>
+              <a:rPr lang="en-US" sz="1350" dirty="0">
+                <a:solidFill>
+                  <a:srgbClr val="6B6357"/>
+                </a:solidFill>
+                <a:latin typeface="Malgun Gothic" pitchFamily="34" charset="0"/>
+                <a:ea typeface="Malgun Gothic" pitchFamily="34" charset="-122"/>
+                <a:cs typeface="Malgun Gothic" pitchFamily="34" charset="-120"/>
+              </a:rPr>
+              <a:t>내 노트북에서 돌릴 때</a:t>
+            </a:r>
+            <a:endParaRPr lang="en-US" sz="1350" dirty="0"/>
+          </a:p>
+        </p:txBody>
+      </p:sp>
+      <p:sp>
+        <p:nvSpPr>
+          <p:cNvPr id="12" name="Text 10"/>
+          <p:cNvSpPr/>
+          <p:nvPr/>
+        </p:nvSpPr>
+        <p:spPr>
+          <a:xfrm>
+            <a:off x="548640" y="4486808"/>
+            <a:ext cx="11091672" cy="265103"/>
+          </a:xfrm>
+          <a:prstGeom prst="rect">
+            <a:avLst/>
+          </a:prstGeom>
+          <a:noFill/>
+          <a:ln/>
+        </p:spPr>
+        <p:txBody>
+          <a:bodyPr wrap="square" rtlCol="0" anchor="t">
+            <a:normAutofit/>
+          </a:bodyPr>
+          <a:lstStyle/>
+          <a:p>
+            <a:pPr indent="0" marL="0">
+              <a:lnSpc>
+                <a:spcPct val="108000"/>
+              </a:lnSpc>
+              <a:spcAft>
+                <a:spcPts val="200"/>
+              </a:spcAft>
+              <a:buNone/>
+            </a:pPr>
+            <a:r>
+              <a:rPr lang="en-US" sz="1350" b="1" dirty="0">
+                <a:solidFill>
+                  <a:srgbClr val="2A2723"/>
+                </a:solidFill>
+                <a:latin typeface="Malgun Gothic" pitchFamily="34" charset="0"/>
+                <a:ea typeface="Malgun Gothic" pitchFamily="34" charset="-122"/>
+                <a:cs typeface="Malgun Gothic" pitchFamily="34" charset="-120"/>
+              </a:rPr>
+              <a:t>내 화면</a:t>
+            </a:r>
+            <a:endParaRPr lang="en-US" sz="1350" dirty="0"/>
+          </a:p>
+        </p:txBody>
+      </p:sp>
+      <p:sp>
+        <p:nvSpPr>
+          <p:cNvPr id="13" name="Text 11"/>
+          <p:cNvSpPr/>
+          <p:nvPr/>
+        </p:nvSpPr>
+        <p:spPr>
+          <a:xfrm>
+            <a:off x="548640" y="4876209"/>
+            <a:ext cx="11091672" cy="265103"/>
+          </a:xfrm>
+          <a:prstGeom prst="rect">
+            <a:avLst/>
+          </a:prstGeom>
+          <a:noFill/>
+          <a:ln/>
+        </p:spPr>
+        <p:txBody>
+          <a:bodyPr wrap="square" rtlCol="0" anchor="t">
+            <a:normAutofit/>
+          </a:bodyPr>
+          <a:lstStyle/>
+          <a:p>
+            <a:pPr indent="0" marL="0">
+              <a:lnSpc>
+                <a:spcPct val="108000"/>
+              </a:lnSpc>
+              <a:spcAft>
+                <a:spcPts val="200"/>
+              </a:spcAft>
+              <a:buNone/>
+            </a:pPr>
+            <a:r>
+              <a:rPr lang="en-US" sz="1350" b="1" dirty="0">
+                <a:solidFill>
+                  <a:srgbClr val="2A2723"/>
+                </a:solidFill>
+                <a:latin typeface="Malgun Gothic" pitchFamily="34" charset="0"/>
+                <a:ea typeface="Malgun Gothic" pitchFamily="34" charset="-122"/>
+                <a:cs typeface="Malgun Gothic" pitchFamily="34" charset="-120"/>
+              </a:rPr>
+              <a:t>내 컴퓨터에서 추론</a:t>
+            </a:r>
+            <a:pPr indent="0" marL="0">
+              <a:lnSpc>
+                <a:spcPct val="108000"/>
+              </a:lnSpc>
+              <a:spcAft>
+                <a:spcPts val="200"/>
+              </a:spcAft>
+              <a:buNone/>
+            </a:pPr>
+            <a:r>
+              <a:rPr lang="en-US" sz="1350" dirty="0">
+                <a:solidFill>
+                  <a:srgbClr val="6B6357"/>
+                </a:solidFill>
+                <a:latin typeface="Malgun Gothic" pitchFamily="34" charset="0"/>
+                <a:ea typeface="Malgun Gothic" pitchFamily="34" charset="-122"/>
+                <a:cs typeface="Malgun Gothic" pitchFamily="34" charset="-120"/>
+              </a:rPr>
+              <a:t>경계를 넘지 않음</a:t>
+            </a:r>
+            <a:endParaRPr lang="en-US" sz="1350" dirty="0"/>
+          </a:p>
+        </p:txBody>
+      </p:sp>
+      <p:sp>
+        <p:nvSpPr>
+          <p:cNvPr id="14" name="Text 12"/>
+          <p:cNvSpPr/>
+          <p:nvPr/>
+        </p:nvSpPr>
+        <p:spPr>
+          <a:xfrm>
+            <a:off x="548640" y="5265610"/>
+            <a:ext cx="11091672" cy="265103"/>
+          </a:xfrm>
+          <a:prstGeom prst="rect">
+            <a:avLst/>
+          </a:prstGeom>
+          <a:noFill/>
+          <a:ln/>
+        </p:spPr>
+        <p:txBody>
+          <a:bodyPr wrap="square" rtlCol="0" anchor="t">
+            <a:normAutofit/>
+          </a:bodyPr>
+          <a:lstStyle/>
+          <a:p>
+            <a:pPr indent="0" marL="0">
+              <a:lnSpc>
+                <a:spcPct val="108000"/>
+              </a:lnSpc>
+              <a:spcAft>
+                <a:spcPts val="200"/>
+              </a:spcAft>
+              <a:buNone/>
+            </a:pPr>
+            <a:r>
+              <a:rPr lang="en-US" sz="1350" b="1" dirty="0">
+                <a:solidFill>
+                  <a:srgbClr val="2A2723"/>
+                </a:solidFill>
+                <a:latin typeface="Malgun Gothic" pitchFamily="34" charset="0"/>
+                <a:ea typeface="Malgun Gothic" pitchFamily="34" charset="-122"/>
+                <a:cs typeface="Malgun Gothic" pitchFamily="34" charset="-120"/>
+              </a:rPr>
+              <a:t>응답</a:t>
+            </a:r>
+            <a:endParaRPr lang="en-US" sz="1350" dirty="0"/>
+          </a:p>
+        </p:txBody>
+      </p:sp>
+      <p:sp>
+        <p:nvSpPr>
+          <p:cNvPr id="15" name="Text 13"/>
+          <p:cNvSpPr/>
+          <p:nvPr/>
+        </p:nvSpPr>
+        <p:spPr>
+          <a:xfrm>
+            <a:off x="548640" y="5655011"/>
+            <a:ext cx="11091672" cy="265103"/>
+          </a:xfrm>
+          <a:prstGeom prst="rect">
+            <a:avLst/>
+          </a:prstGeom>
+          <a:noFill/>
+          <a:ln/>
+        </p:spPr>
+        <p:txBody>
+          <a:bodyPr wrap="square" rtlCol="0" anchor="t">
+            <a:normAutofit/>
+          </a:bodyPr>
+          <a:lstStyle/>
+          <a:p>
+            <a:pPr indent="0" marL="0">
+              <a:lnSpc>
+                <a:spcPct val="108000"/>
+              </a:lnSpc>
+              <a:spcAft>
+                <a:spcPts val="200"/>
+              </a:spcAft>
+              <a:buNone/>
+            </a:pPr>
+            <a:r>
+              <a:rPr lang="en-US" sz="1350" dirty="0">
+                <a:solidFill>
+                  <a:srgbClr val="6B6357"/>
+                </a:solidFill>
+                <a:latin typeface="Malgun Gothic" pitchFamily="34" charset="0"/>
+                <a:ea typeface="Malgun Gothic" pitchFamily="34" charset="-122"/>
+                <a:cs typeface="Malgun Gothic" pitchFamily="34" charset="-120"/>
+              </a:rPr>
               <a:t>🔵 남을 수 있는 것 · 디스크에 쌓이는 프롬프트 기록, 자동 백업, 화면 캡처, 이 컴퓨터에 접근하는 사람</a:t>
             </a:r>
             <a:endParaRPr lang="en-US" sz="1350" dirty="0"/>
@@ -16431,18 +16820,18 @@
       </p:sp>
       <p:sp>
         <p:nvSpPr>
-          <p:cNvPr id="9" name="Shape 7"/>
-          <p:cNvSpPr/>
-          <p:nvPr/>
-        </p:nvSpPr>
-        <p:spPr>
-          <a:xfrm>
-            <a:off x="548640" y="3663315"/>
-            <a:ext cx="11091672" cy="548640"/>
+          <p:cNvPr id="16" name="Shape 14"/>
+          <p:cNvSpPr/>
+          <p:nvPr/>
+        </p:nvSpPr>
+        <p:spPr>
+          <a:xfrm>
+            <a:off x="548640" y="6044412"/>
+            <a:ext cx="11091672" cy="466116"/>
           </a:xfrm>
           <a:prstGeom prst="roundRect">
             <a:avLst>
-              <a:gd name="adj" fmla="val 10000"/>
+              <a:gd name="adj" fmla="val 11770"/>
             </a:avLst>
           </a:prstGeom>
           <a:solidFill>
@@ -16453,14 +16842,14 @@
       </p:sp>
       <p:sp>
         <p:nvSpPr>
-          <p:cNvPr id="10" name="Shape 8"/>
-          <p:cNvSpPr/>
-          <p:nvPr/>
-        </p:nvSpPr>
-        <p:spPr>
-          <a:xfrm>
-            <a:off x="548640" y="3663315"/>
-            <a:ext cx="54864" cy="548640"/>
+          <p:cNvPr id="17" name="Shape 15"/>
+          <p:cNvSpPr/>
+          <p:nvPr/>
+        </p:nvSpPr>
+        <p:spPr>
+          <a:xfrm>
+            <a:off x="548640" y="6044412"/>
+            <a:ext cx="54864" cy="466116"/>
           </a:xfrm>
           <a:prstGeom prst="rect">
             <a:avLst/>
@@ -16473,14 +16862,14 @@
       </p:sp>
       <p:sp>
         <p:nvSpPr>
-          <p:cNvPr id="11" name="Text 9"/>
-          <p:cNvSpPr/>
-          <p:nvPr/>
-        </p:nvSpPr>
-        <p:spPr>
-          <a:xfrm>
-            <a:off x="786384" y="3663315"/>
-            <a:ext cx="10707624" cy="548640"/>
+          <p:cNvPr id="18" name="Text 16"/>
+          <p:cNvSpPr/>
+          <p:nvPr/>
+        </p:nvSpPr>
+        <p:spPr>
+          <a:xfrm>
+            <a:off x="786384" y="6044412"/>
+            <a:ext cx="10707624" cy="466116"/>
           </a:xfrm>
           <a:prstGeom prst="rect">
             <a:avLst/>
